--- a/entregables/editoriales/100_VOCES_Presentacion_Ejecutiva_10.pptx
+++ b/entregables/editoriales/100_VOCES_Presentacion_Ejecutiva_10.pptx
@@ -521,6 +521,11 @@
           </a:p>
           <a:p>
             <a:r>
+              <a:t>Edades: https://repositoriodocumental.ine.mx/xmlui/bitstream/handle/123456789/186643/Deceyec-Estudio-Participaci%C3%B3n-ciudadada-2024.pdf#page=18</a:t>
+            </a:r>
+          </a:p>
+          <a:p>
+            <a:r>
               <a:t>Proyecto independiente para el Hackathon INE 2026. No es un producto oficial ni cuenta con aval del INE.</a:t>
             </a:r>
           </a:p>
@@ -601,6 +606,11 @@
           </a:p>
           <a:p>
             <a:r>
+              <a:t>Edades: https://repositoriodocumental.ine.mx/xmlui/bitstream/handle/123456789/186643/Deceyec-Estudio-Participaci%C3%B3n-ciudadada-2024.pdf#page=18</a:t>
+            </a:r>
+          </a:p>
+          <a:p>
+            <a:r>
               <a:t>Proyecto independiente para el Hackathon INE 2026. No es un producto oficial ni cuenta con aval del INE.</a:t>
             </a:r>
           </a:p>
@@ -681,6 +691,11 @@
           </a:p>
           <a:p>
             <a:r>
+              <a:t>Edades: https://repositoriodocumental.ine.mx/xmlui/bitstream/handle/123456789/186643/Deceyec-Estudio-Participaci%C3%B3n-ciudadada-2024.pdf#page=18</a:t>
+            </a:r>
+          </a:p>
+          <a:p>
+            <a:r>
               <a:t>Proyecto independiente para el Hackathon INE 2026. No es un producto oficial ni cuenta con aval del INE.</a:t>
             </a:r>
           </a:p>
@@ -761,6 +776,11 @@
           </a:p>
           <a:p>
             <a:r>
+              <a:t>Edades: https://repositoriodocumental.ine.mx/xmlui/bitstream/handle/123456789/186643/Deceyec-Estudio-Participaci%C3%B3n-ciudadada-2024.pdf#page=18</a:t>
+            </a:r>
+          </a:p>
+          <a:p>
+            <a:r>
               <a:t>Proyecto independiente para el Hackathon INE 2026. No es un producto oficial ni cuenta con aval del INE.</a:t>
             </a:r>
           </a:p>
@@ -841,6 +861,11 @@
           </a:p>
           <a:p>
             <a:r>
+              <a:t>Edades: https://repositoriodocumental.ine.mx/xmlui/bitstream/handle/123456789/186643/Deceyec-Estudio-Participaci%C3%B3n-ciudadada-2024.pdf#page=18</a:t>
+            </a:r>
+          </a:p>
+          <a:p>
+            <a:r>
               <a:t>Proyecto independiente para el Hackathon INE 2026. No es un producto oficial ni cuenta con aval del INE.</a:t>
             </a:r>
           </a:p>
@@ -921,6 +946,11 @@
           </a:p>
           <a:p>
             <a:r>
+              <a:t>Edades: https://repositoriodocumental.ine.mx/xmlui/bitstream/handle/123456789/186643/Deceyec-Estudio-Participaci%C3%B3n-ciudadada-2024.pdf#page=18</a:t>
+            </a:r>
+          </a:p>
+          <a:p>
+            <a:r>
               <a:t>Proyecto independiente para el Hackathon INE 2026. No es un producto oficial ni cuenta con aval del INE.</a:t>
             </a:r>
           </a:p>
@@ -1001,6 +1031,11 @@
           </a:p>
           <a:p>
             <a:r>
+              <a:t>Edades: https://repositoriodocumental.ine.mx/xmlui/bitstream/handle/123456789/186643/Deceyec-Estudio-Participaci%C3%B3n-ciudadada-2024.pdf#page=18</a:t>
+            </a:r>
+          </a:p>
+          <a:p>
+            <a:r>
               <a:t>Proyecto independiente para el Hackathon INE 2026. No es un producto oficial ni cuenta con aval del INE.</a:t>
             </a:r>
           </a:p>
@@ -1081,6 +1116,11 @@
           </a:p>
           <a:p>
             <a:r>
+              <a:t>Edades: https://repositoriodocumental.ine.mx/xmlui/bitstream/handle/123456789/186643/Deceyec-Estudio-Participaci%C3%B3n-ciudadada-2024.pdf#page=18</a:t>
+            </a:r>
+          </a:p>
+          <a:p>
+            <a:r>
               <a:t>Proyecto independiente para el Hackathon INE 2026. No es un producto oficial ni cuenta con aval del INE.</a:t>
             </a:r>
           </a:p>
@@ -1151,12 +1191,17 @@
           <a:lstStyle/>
           <a:p>
             <a:r>
-              <a:t>El control absoluto va de 0 a 100. Exportación nacional, complemento o entidad 2024. Incluir fuente dentro de la imagen.</a:t>
+              <a:t>El control absoluto va de 0 a 100. Exportación nacional, complemento, entidad o edad nacional de 2024. Incluir fuente dentro de la imagen.</a:t>
             </a:r>
           </a:p>
           <a:p>
             <a:r>
               <a:t>Fuente: https://ine.mx/wp-content/uploads/2025/06/Manual-Conteos-Censales-2009-2024.pdf (pp. 16, 17, 21 y 30 según el dato).</a:t>
+            </a:r>
+          </a:p>
+          <a:p>
+            <a:r>
+              <a:t>Edades: https://repositoriodocumental.ine.mx/xmlui/bitstream/handle/123456789/186643/Deceyec-Estudio-Participaci%C3%B3n-ciudadada-2024.pdf#page=18</a:t>
             </a:r>
           </a:p>
           <a:p>
@@ -1237,6 +1282,11 @@
           <a:p>
             <a:r>
               <a:t>Fuente: https://ine.mx/wp-content/uploads/2025/06/Manual-Conteos-Censales-2009-2024.pdf (pp. 16, 17, 21 y 30 según el dato).</a:t>
+            </a:r>
+          </a:p>
+          <a:p>
+            <a:r>
+              <a:t>Edades: https://repositoriodocumental.ine.mx/xmlui/bitstream/handle/123456789/186643/Deceyec-Estudio-Participaci%C3%B3n-ciudadada-2024.pdf#page=18</a:t>
             </a:r>
           </a:p>
           <a:p>
@@ -4504,7 +4554,7 @@
               </a:defRPr>
             </a:pPr>
             <a:r>
-              <a:t>Fuente de datos: INE, Manual CCPC 2009–2024 · pp. 16, 17, 21 y 30</a:t>
+              <a:t>INE: Manual CCPC, pp. 16, 17, 21, 30 · Edades: Estudio Participación 2024, p. 18</a:t>
             </a:r>
           </a:p>
         </p:txBody>
@@ -4862,7 +4912,7 @@
               </a:defRPr>
             </a:pPr>
             <a:r>
-              <a:t>Fuente de datos: INE, Manual CCPC 2009–2024 · pp. 16, 17, 21 y 30</a:t>
+              <a:t>INE: Manual CCPC, pp. 16, 17, 21, 30 · Edades: Estudio Participación 2024, p. 18</a:t>
             </a:r>
           </a:p>
         </p:txBody>
@@ -5236,7 +5286,7 @@
               </a:defRPr>
             </a:pPr>
             <a:r>
-              <a:t>Fuente de datos: INE, Manual CCPC 2009–2024 · pp. 16, 17, 21 y 30</a:t>
+              <a:t>INE: Manual CCPC, pp. 16, 17, 21, 30 · Edades: Estudio Participación 2024, p. 18</a:t>
             </a:r>
           </a:p>
         </p:txBody>
@@ -9910,7 +9960,7 @@
               </a:defRPr>
             </a:pPr>
             <a:r>
-              <a:t>Fuente de datos: INE, Manual CCPC 2009–2024 · pp. 16, 17, 21 y 30</a:t>
+              <a:t>INE: Manual CCPC, pp. 16, 17, 21, 30 · Edades: Estudio Participación 2024, p. 18</a:t>
             </a:r>
           </a:p>
         </p:txBody>
@@ -10268,7 +10318,7 @@
               </a:defRPr>
             </a:pPr>
             <a:r>
-              <a:t>Fuente de datos: INE, Manual CCPC 2009–2024 · pp. 16, 17, 21 y 30</a:t>
+              <a:t>INE: Manual CCPC, pp. 16, 17, 21, 30 · Edades: Estudio Participación 2024, p. 18</a:t>
             </a:r>
           </a:p>
         </p:txBody>
@@ -10532,7 +10582,7 @@
               </a:defRPr>
             </a:pPr>
             <a:r>
-              <a:t>6 elecciones nacionales</a:t>
+              <a:t>6 elecciones · 8 entidades seleccionadas</a:t>
             </a:r>
           </a:p>
           <a:p>
@@ -10548,7 +10598,7 @@
               </a:defRPr>
             </a:pPr>
             <a:r>
-              <a:t>8 entidades, selección demostrativa</a:t>
+              <a:t>18 grupos de edad nacionales (2024)</a:t>
             </a:r>
           </a:p>
         </p:txBody>
@@ -10642,7 +10692,7 @@
               </a:defRPr>
             </a:pPr>
             <a:r>
-              <a:t>Fuente de datos: INE, Manual CCPC 2009–2024 · pp. 16, 17, 21 y 30</a:t>
+              <a:t>INE: Manual CCPC, pp. 16, 17, 21, 30 · Edades: Estudio Participación 2024, p. 18</a:t>
             </a:r>
           </a:p>
         </p:txBody>
@@ -11000,7 +11050,7 @@
               </a:defRPr>
             </a:pPr>
             <a:r>
-              <a:t>Fuente de datos: INE, Manual CCPC 2009–2024 · pp. 16, 17, 21 y 30</a:t>
+              <a:t>INE: Manual CCPC, pp. 16, 17, 21, 30 · Edades: Estudio Participación 2024, p. 18</a:t>
             </a:r>
           </a:p>
         </p:txBody>
@@ -11225,7 +11275,7 @@
               </a:defRPr>
             </a:pPr>
             <a:r>
-              <a:t>Cinco preguntas, cinco explicaciones</a:t>
+              <a:t>Siete preguntas con explicación</a:t>
             </a:r>
           </a:p>
         </p:txBody>
@@ -11264,7 +11314,7 @@
               </a:defRPr>
             </a:pPr>
             <a:r>
-              <a:t>Retroalimentación + cierre + reinicio</a:t>
+              <a:t>Edad 25–29: 47,3% nacional en 2024</a:t>
             </a:r>
           </a:p>
         </p:txBody>
@@ -11303,7 +11353,7 @@
               </a:defRPr>
             </a:pPr>
             <a:r>
-              <a:t>Tasas · unidades · contexto · límites · gráficas.</a:t>
+              <a:t>Denominador · edad · lectura crítica.</a:t>
             </a:r>
           </a:p>
           <a:p>
@@ -11319,7 +11369,7 @@
               </a:defRPr>
             </a:pPr>
             <a:r>
-              <a:t>Actividad de aula de 15 minutos.</a:t>
+              <a:t>Primer uso: taller de 15 minutos.</a:t>
             </a:r>
           </a:p>
         </p:txBody>
@@ -11358,7 +11408,7 @@
               </a:defRPr>
             </a:pPr>
             <a:r>
-              <a:t>Fuente de datos: INE, Manual CCPC 2009–2024 · pp. 16, 17, 21 y 30</a:t>
+              <a:t>INE: Manual CCPC, pp. 16, 17, 21, 30 · Edades: Estudio Participación 2024, p. 18</a:t>
             </a:r>
           </a:p>
         </p:txBody>
@@ -11622,7 +11672,7 @@
               </a:defRPr>
             </a:pPr>
             <a:r>
-              <a:t>59,7% observado → 64,7% hipotético</a:t>
+              <a:t>Referencia: 59,7% · A: 54,7% · B: 64,7%</a:t>
             </a:r>
           </a:p>
         </p:txBody>
@@ -11661,7 +11711,7 @@
               </a:defRPr>
             </a:pPr>
             <a:r>
-              <a:t>+5,0 pp · ≈ +8,4% relativo.</a:t>
+              <a:t>A: −5,0 pp · B: +5,0 pp · B−A: 10,0 pp.</a:t>
             </a:r>
           </a:p>
           <a:p>
@@ -11677,7 +11727,7 @@
               </a:defRPr>
             </a:pPr>
             <a:r>
-              <a:t>Tarjetas PNG en tres tamaños + texto accesible.</a:t>
+              <a:t>Tarjetas y carrusel con texto accesible.</a:t>
             </a:r>
           </a:p>
         </p:txBody>
@@ -11716,7 +11766,7 @@
               </a:defRPr>
             </a:pPr>
             <a:r>
-              <a:t>Fuente de datos: INE, Manual CCPC 2009–2024 · pp. 16, 17, 21 y 30</a:t>
+              <a:t>INE: Manual CCPC, pp. 16, 17, 21, 30 · Edades: Estudio Participación 2024, p. 18</a:t>
             </a:r>
           </a:p>
         </p:txBody>
@@ -12035,7 +12085,7 @@
               </a:defRPr>
             </a:pPr>
             <a:r>
-              <a:t>Aula · comunidad · redes.</a:t>
+              <a:t>Kit docente descargable · respaldo sin red.</a:t>
             </a:r>
           </a:p>
           <a:p>
@@ -12051,7 +12101,7 @@
               </a:defRPr>
             </a:pPr>
             <a:r>
-              <a:t>Adopción institucional sujeta a revisión.</a:t>
+              <a:t>Sitio privado; acceso público por comprobar.</a:t>
             </a:r>
           </a:p>
         </p:txBody>
@@ -12090,7 +12140,7 @@
               </a:defRPr>
             </a:pPr>
             <a:r>
-              <a:t>Fuente de datos: INE, Manual CCPC 2009–2024 · pp. 16, 17, 21 y 30</a:t>
+              <a:t>INE: Manual CCPC, pp. 16, 17, 21, 30 · Edades: Estudio Participación 2024, p. 18</a:t>
             </a:r>
           </a:p>
         </p:txBody>
